--- a/Solid Rock, The (My Hope Is Built).pptx
+++ b/Solid Rock, The (My Hope Is Built).pptx
@@ -7,12 +7,16 @@
   <p:sldIdLst>
     <p:sldId id="274" r:id="rId2"/>
     <p:sldId id="280" r:id="rId3"/>
-    <p:sldId id="286" r:id="rId4"/>
-    <p:sldId id="281" r:id="rId5"/>
-    <p:sldId id="282" r:id="rId6"/>
-    <p:sldId id="283" r:id="rId7"/>
-    <p:sldId id="284" r:id="rId8"/>
-    <p:sldId id="285" r:id="rId9"/>
+    <p:sldId id="287" r:id="rId4"/>
+    <p:sldId id="286" r:id="rId5"/>
+    <p:sldId id="288" r:id="rId6"/>
+    <p:sldId id="281" r:id="rId7"/>
+    <p:sldId id="282" r:id="rId8"/>
+    <p:sldId id="289" r:id="rId9"/>
+    <p:sldId id="290" r:id="rId10"/>
+    <p:sldId id="284" r:id="rId11"/>
+    <p:sldId id="291" r:id="rId12"/>
+    <p:sldId id="292" r:id="rId13"/>
   </p:sldIdLst>
   <p:sldSz cx="9144000" cy="6858000" type="screen4x3"/>
   <p:notesSz cx="6858000" cy="9144000"/>
@@ -250,7 +254,7 @@
           <a:p>
             <a:fld id="{E759A0DE-F190-5444-87AC-4719D5F20D15}" type="datetimeFigureOut">
               <a:rPr lang="en-US" smtClean="0"/>
-              <a:t>7/14/26</a:t>
+              <a:t>10/21/26</a:t>
             </a:fld>
             <a:endParaRPr lang="en-US"/>
           </a:p>
@@ -420,7 +424,7 @@
           <a:p>
             <a:fld id="{E759A0DE-F190-5444-87AC-4719D5F20D15}" type="datetimeFigureOut">
               <a:rPr lang="en-US" smtClean="0"/>
-              <a:t>7/14/26</a:t>
+              <a:t>10/21/26</a:t>
             </a:fld>
             <a:endParaRPr lang="en-US"/>
           </a:p>
@@ -600,7 +604,7 @@
           <a:p>
             <a:fld id="{E759A0DE-F190-5444-87AC-4719D5F20D15}" type="datetimeFigureOut">
               <a:rPr lang="en-US" smtClean="0"/>
-              <a:t>7/14/26</a:t>
+              <a:t>10/21/26</a:t>
             </a:fld>
             <a:endParaRPr lang="en-US"/>
           </a:p>
@@ -770,7 +774,7 @@
           <a:p>
             <a:fld id="{E759A0DE-F190-5444-87AC-4719D5F20D15}" type="datetimeFigureOut">
               <a:rPr lang="en-US" smtClean="0"/>
-              <a:t>7/14/26</a:t>
+              <a:t>10/21/26</a:t>
             </a:fld>
             <a:endParaRPr lang="en-US"/>
           </a:p>
@@ -1016,7 +1020,7 @@
           <a:p>
             <a:fld id="{E759A0DE-F190-5444-87AC-4719D5F20D15}" type="datetimeFigureOut">
               <a:rPr lang="en-US" smtClean="0"/>
-              <a:t>7/14/26</a:t>
+              <a:t>10/21/26</a:t>
             </a:fld>
             <a:endParaRPr lang="en-US"/>
           </a:p>
@@ -1248,7 +1252,7 @@
           <a:p>
             <a:fld id="{E759A0DE-F190-5444-87AC-4719D5F20D15}" type="datetimeFigureOut">
               <a:rPr lang="en-US" smtClean="0"/>
-              <a:t>7/14/26</a:t>
+              <a:t>10/21/26</a:t>
             </a:fld>
             <a:endParaRPr lang="en-US"/>
           </a:p>
@@ -1615,7 +1619,7 @@
           <a:p>
             <a:fld id="{E759A0DE-F190-5444-87AC-4719D5F20D15}" type="datetimeFigureOut">
               <a:rPr lang="en-US" smtClean="0"/>
-              <a:t>7/14/26</a:t>
+              <a:t>10/21/26</a:t>
             </a:fld>
             <a:endParaRPr lang="en-US"/>
           </a:p>
@@ -1733,7 +1737,7 @@
           <a:p>
             <a:fld id="{E759A0DE-F190-5444-87AC-4719D5F20D15}" type="datetimeFigureOut">
               <a:rPr lang="en-US" smtClean="0"/>
-              <a:t>7/14/26</a:t>
+              <a:t>10/21/26</a:t>
             </a:fld>
             <a:endParaRPr lang="en-US"/>
           </a:p>
@@ -1828,7 +1832,7 @@
           <a:p>
             <a:fld id="{E759A0DE-F190-5444-87AC-4719D5F20D15}" type="datetimeFigureOut">
               <a:rPr lang="en-US" smtClean="0"/>
-              <a:t>7/14/26</a:t>
+              <a:t>10/21/26</a:t>
             </a:fld>
             <a:endParaRPr lang="en-US"/>
           </a:p>
@@ -2105,7 +2109,7 @@
           <a:p>
             <a:fld id="{E759A0DE-F190-5444-87AC-4719D5F20D15}" type="datetimeFigureOut">
               <a:rPr lang="en-US" smtClean="0"/>
-              <a:t>7/14/26</a:t>
+              <a:t>10/21/26</a:t>
             </a:fld>
             <a:endParaRPr lang="en-US"/>
           </a:p>
@@ -2362,7 +2366,7 @@
           <a:p>
             <a:fld id="{E759A0DE-F190-5444-87AC-4719D5F20D15}" type="datetimeFigureOut">
               <a:rPr lang="en-US" smtClean="0"/>
-              <a:t>7/14/26</a:t>
+              <a:t>10/21/26</a:t>
             </a:fld>
             <a:endParaRPr lang="en-US"/>
           </a:p>
@@ -2575,7 +2579,7 @@
           <a:p>
             <a:fld id="{E759A0DE-F190-5444-87AC-4719D5F20D15}" type="datetimeFigureOut">
               <a:rPr lang="en-US" smtClean="0"/>
-              <a:t>7/14/26</a:t>
+              <a:t>10/21/26</a:t>
             </a:fld>
             <a:endParaRPr lang="en-US"/>
           </a:p>
@@ -3135,6 +3139,426 @@
 </p:sld>
 </file>
 
+<file path=ppt/slides/slide10.xml><?xml version="1.0" encoding="utf-8"?>
+<p:sld xmlns:a="http://schemas.openxmlformats.org/drawingml/2006/main" xmlns:r="http://schemas.openxmlformats.org/officeDocument/2006/relationships" xmlns:p="http://schemas.openxmlformats.org/presentationml/2006/main">
+  <p:cSld>
+    <p:bg>
+      <p:bgPr>
+        <a:solidFill>
+          <a:schemeClr val="tx1"/>
+        </a:solidFill>
+        <a:effectLst/>
+      </p:bgPr>
+    </p:bg>
+    <p:spTree>
+      <p:nvGrpSpPr>
+        <p:cNvPr id="1" name="">
+          <a:extLst>
+            <a:ext uri="{FF2B5EF4-FFF2-40B4-BE49-F238E27FC236}">
+              <a16:creationId xmlns:a16="http://schemas.microsoft.com/office/drawing/2014/main" id="{C722DC9B-A22E-044C-1EAC-0EDEFB8036C4}"/>
+            </a:ext>
+          </a:extLst>
+        </p:cNvPr>
+        <p:cNvGrpSpPr/>
+        <p:nvPr/>
+      </p:nvGrpSpPr>
+      <p:grpSpPr>
+        <a:xfrm>
+          <a:off x="0" y="0"/>
+          <a:ext cx="0" cy="0"/>
+          <a:chOff x="0" y="0"/>
+          <a:chExt cx="0" cy="0"/>
+        </a:xfrm>
+      </p:grpSpPr>
+      <p:sp>
+        <p:nvSpPr>
+          <p:cNvPr id="3" name="Subtitle 2">
+            <a:extLst>
+              <a:ext uri="{FF2B5EF4-FFF2-40B4-BE49-F238E27FC236}">
+                <a16:creationId xmlns:a16="http://schemas.microsoft.com/office/drawing/2014/main" id="{57BE51F2-EF32-9E8B-AA9E-5C4166980B59}"/>
+              </a:ext>
+            </a:extLst>
+          </p:cNvPr>
+          <p:cNvSpPr>
+            <a:spLocks noGrp="1"/>
+          </p:cNvSpPr>
+          <p:nvPr>
+            <p:ph type="subTitle" idx="1"/>
+          </p:nvPr>
+        </p:nvSpPr>
+        <p:spPr>
+          <a:xfrm>
+            <a:off x="84221" y="213360"/>
+            <a:ext cx="8891337" cy="6416040"/>
+          </a:xfrm>
+        </p:spPr>
+        <p:txBody>
+          <a:bodyPr>
+            <a:noAutofit/>
+          </a:bodyPr>
+          <a:lstStyle/>
+          <a:p>
+            <a:endParaRPr lang="en-US" sz="5400" dirty="0">
+              <a:solidFill>
+                <a:schemeClr val="bg1"/>
+              </a:solidFill>
+              <a:latin typeface="Avenir Medium" panose="02000503020000020003" pitchFamily="2" charset="0"/>
+              <a:ea typeface="Bodoni Ornaments" pitchFamily="2" charset="0"/>
+            </a:endParaRPr>
+          </a:p>
+          <a:p>
+            <a:r>
+              <a:rPr lang="en-US" sz="5400" dirty="0">
+                <a:solidFill>
+                  <a:schemeClr val="bg1"/>
+                </a:solidFill>
+                <a:latin typeface="Avenir Medium" panose="02000503020000020003" pitchFamily="2" charset="0"/>
+                <a:ea typeface="Bodoni Ornaments" pitchFamily="2" charset="0"/>
+              </a:rPr>
+              <a:t>When He shall come with </a:t>
+            </a:r>
+          </a:p>
+          <a:p>
+            <a:r>
+              <a:rPr lang="en-US" sz="5400" dirty="0">
+                <a:solidFill>
+                  <a:schemeClr val="bg1"/>
+                </a:solidFill>
+                <a:latin typeface="Avenir Medium" panose="02000503020000020003" pitchFamily="2" charset="0"/>
+                <a:ea typeface="Bodoni Ornaments" pitchFamily="2" charset="0"/>
+              </a:rPr>
+              <a:t>trumpet sound</a:t>
+            </a:r>
+          </a:p>
+          <a:p>
+            <a:endParaRPr lang="en-US" sz="5400" dirty="0">
+              <a:solidFill>
+                <a:schemeClr val="bg1"/>
+              </a:solidFill>
+              <a:latin typeface="Avenir Medium" panose="02000503020000020003" pitchFamily="2" charset="0"/>
+              <a:ea typeface="Bodoni Ornaments" pitchFamily="2" charset="0"/>
+            </a:endParaRPr>
+          </a:p>
+          <a:p>
+            <a:r>
+              <a:rPr lang="en-US" sz="5400" dirty="0">
+                <a:solidFill>
+                  <a:schemeClr val="bg1"/>
+                </a:solidFill>
+                <a:latin typeface="Avenir Medium" panose="02000503020000020003" pitchFamily="2" charset="0"/>
+                <a:ea typeface="Bodoni Ornaments" pitchFamily="2" charset="0"/>
+              </a:rPr>
+              <a:t>Oh may I then in </a:t>
+            </a:r>
+          </a:p>
+          <a:p>
+            <a:r>
+              <a:rPr lang="en-US" sz="5400" dirty="0">
+                <a:solidFill>
+                  <a:schemeClr val="bg1"/>
+                </a:solidFill>
+                <a:latin typeface="Avenir Medium" panose="02000503020000020003" pitchFamily="2" charset="0"/>
+                <a:ea typeface="Bodoni Ornaments" pitchFamily="2" charset="0"/>
+              </a:rPr>
+              <a:t>Him be found</a:t>
+            </a:r>
+          </a:p>
+          <a:p>
+            <a:endParaRPr lang="en-US" sz="5400" dirty="0">
+              <a:solidFill>
+                <a:schemeClr val="bg1"/>
+              </a:solidFill>
+              <a:latin typeface="Avenir Medium" panose="02000503020000020003" pitchFamily="2" charset="0"/>
+              <a:ea typeface="Bodoni Ornaments" pitchFamily="2" charset="0"/>
+            </a:endParaRPr>
+          </a:p>
+          <a:p>
+            <a:endParaRPr lang="en-US" sz="5400" dirty="0">
+              <a:solidFill>
+                <a:schemeClr val="bg1"/>
+              </a:solidFill>
+              <a:latin typeface="Avenir Medium" panose="02000503020000020003" pitchFamily="2" charset="0"/>
+              <a:ea typeface="Bodoni Ornaments" pitchFamily="2" charset="0"/>
+            </a:endParaRPr>
+          </a:p>
+        </p:txBody>
+      </p:sp>
+    </p:spTree>
+    <p:extLst>
+      <p:ext uri="{BB962C8B-B14F-4D97-AF65-F5344CB8AC3E}">
+        <p14:creationId xmlns:p14="http://schemas.microsoft.com/office/powerpoint/2010/main" val="419506062"/>
+      </p:ext>
+    </p:extLst>
+  </p:cSld>
+  <p:clrMapOvr>
+    <a:masterClrMapping/>
+  </p:clrMapOvr>
+</p:sld>
+</file>
+
+<file path=ppt/slides/slide11.xml><?xml version="1.0" encoding="utf-8"?>
+<p:sld xmlns:a="http://schemas.openxmlformats.org/drawingml/2006/main" xmlns:r="http://schemas.openxmlformats.org/officeDocument/2006/relationships" xmlns:p="http://schemas.openxmlformats.org/presentationml/2006/main">
+  <p:cSld>
+    <p:bg>
+      <p:bgPr>
+        <a:solidFill>
+          <a:schemeClr val="tx1"/>
+        </a:solidFill>
+        <a:effectLst/>
+      </p:bgPr>
+    </p:bg>
+    <p:spTree>
+      <p:nvGrpSpPr>
+        <p:cNvPr id="1" name="">
+          <a:extLst>
+            <a:ext uri="{FF2B5EF4-FFF2-40B4-BE49-F238E27FC236}">
+              <a16:creationId xmlns:a16="http://schemas.microsoft.com/office/drawing/2014/main" id="{93696778-A3EC-0B0A-FA7B-9AB75F8FEFFD}"/>
+            </a:ext>
+          </a:extLst>
+        </p:cNvPr>
+        <p:cNvGrpSpPr/>
+        <p:nvPr/>
+      </p:nvGrpSpPr>
+      <p:grpSpPr>
+        <a:xfrm>
+          <a:off x="0" y="0"/>
+          <a:ext cx="0" cy="0"/>
+          <a:chOff x="0" y="0"/>
+          <a:chExt cx="0" cy="0"/>
+        </a:xfrm>
+      </p:grpSpPr>
+      <p:sp>
+        <p:nvSpPr>
+          <p:cNvPr id="3" name="Subtitle 2">
+            <a:extLst>
+              <a:ext uri="{FF2B5EF4-FFF2-40B4-BE49-F238E27FC236}">
+                <a16:creationId xmlns:a16="http://schemas.microsoft.com/office/drawing/2014/main" id="{9CE3AD14-96C0-A08F-8C66-6D384F4E8A1E}"/>
+              </a:ext>
+            </a:extLst>
+          </p:cNvPr>
+          <p:cNvSpPr>
+            <a:spLocks noGrp="1"/>
+          </p:cNvSpPr>
+          <p:nvPr>
+            <p:ph type="subTitle" idx="1"/>
+          </p:nvPr>
+        </p:nvSpPr>
+        <p:spPr>
+          <a:xfrm>
+            <a:off x="84221" y="213360"/>
+            <a:ext cx="8891337" cy="6416040"/>
+          </a:xfrm>
+        </p:spPr>
+        <p:txBody>
+          <a:bodyPr>
+            <a:noAutofit/>
+          </a:bodyPr>
+          <a:lstStyle/>
+          <a:p>
+            <a:endParaRPr lang="en-US" sz="5400" dirty="0">
+              <a:solidFill>
+                <a:schemeClr val="bg1"/>
+              </a:solidFill>
+              <a:latin typeface="Avenir Medium" panose="02000503020000020003" pitchFamily="2" charset="0"/>
+              <a:ea typeface="Bodoni Ornaments" pitchFamily="2" charset="0"/>
+            </a:endParaRPr>
+          </a:p>
+          <a:p>
+            <a:r>
+              <a:rPr lang="en-US" sz="5400" dirty="0">
+                <a:solidFill>
+                  <a:schemeClr val="bg1"/>
+                </a:solidFill>
+                <a:latin typeface="Avenir Medium" panose="02000503020000020003" pitchFamily="2" charset="0"/>
+                <a:ea typeface="Bodoni Ornaments" pitchFamily="2" charset="0"/>
+              </a:rPr>
+              <a:t>Dressed In His righteousness alone</a:t>
+            </a:r>
+          </a:p>
+          <a:p>
+            <a:endParaRPr lang="en-US" sz="5400" dirty="0">
+              <a:solidFill>
+                <a:schemeClr val="bg1"/>
+              </a:solidFill>
+              <a:latin typeface="Avenir Medium" panose="02000503020000020003" pitchFamily="2" charset="0"/>
+              <a:ea typeface="Bodoni Ornaments" pitchFamily="2" charset="0"/>
+            </a:endParaRPr>
+          </a:p>
+          <a:p>
+            <a:r>
+              <a:rPr lang="en-US" sz="5400" dirty="0">
+                <a:solidFill>
+                  <a:schemeClr val="bg1"/>
+                </a:solidFill>
+                <a:latin typeface="Avenir Medium" panose="02000503020000020003" pitchFamily="2" charset="0"/>
+                <a:ea typeface="Bodoni Ornaments" pitchFamily="2" charset="0"/>
+              </a:rPr>
+              <a:t>Faultless to stand before the throne</a:t>
+            </a:r>
+          </a:p>
+          <a:p>
+            <a:endParaRPr lang="en-US" sz="5400" dirty="0">
+              <a:solidFill>
+                <a:schemeClr val="bg1"/>
+              </a:solidFill>
+              <a:latin typeface="Avenir Medium" panose="02000503020000020003" pitchFamily="2" charset="0"/>
+              <a:ea typeface="Bodoni Ornaments" pitchFamily="2" charset="0"/>
+            </a:endParaRPr>
+          </a:p>
+        </p:txBody>
+      </p:sp>
+    </p:spTree>
+    <p:extLst>
+      <p:ext uri="{BB962C8B-B14F-4D97-AF65-F5344CB8AC3E}">
+        <p14:creationId xmlns:p14="http://schemas.microsoft.com/office/powerpoint/2010/main" val="3389227638"/>
+      </p:ext>
+    </p:extLst>
+  </p:cSld>
+  <p:clrMapOvr>
+    <a:masterClrMapping/>
+  </p:clrMapOvr>
+</p:sld>
+</file>
+
+<file path=ppt/slides/slide12.xml><?xml version="1.0" encoding="utf-8"?>
+<p:sld xmlns:a="http://schemas.openxmlformats.org/drawingml/2006/main" xmlns:r="http://schemas.openxmlformats.org/officeDocument/2006/relationships" xmlns:p="http://schemas.openxmlformats.org/presentationml/2006/main">
+  <p:cSld>
+    <p:bg>
+      <p:bgPr>
+        <a:solidFill>
+          <a:schemeClr val="tx1"/>
+        </a:solidFill>
+        <a:effectLst/>
+      </p:bgPr>
+    </p:bg>
+    <p:spTree>
+      <p:nvGrpSpPr>
+        <p:cNvPr id="1" name="">
+          <a:extLst>
+            <a:ext uri="{FF2B5EF4-FFF2-40B4-BE49-F238E27FC236}">
+              <a16:creationId xmlns:a16="http://schemas.microsoft.com/office/drawing/2014/main" id="{C7087FE0-B142-323B-48DC-2C6DCB53ED16}"/>
+            </a:ext>
+          </a:extLst>
+        </p:cNvPr>
+        <p:cNvGrpSpPr/>
+        <p:nvPr/>
+      </p:nvGrpSpPr>
+      <p:grpSpPr>
+        <a:xfrm>
+          <a:off x="0" y="0"/>
+          <a:ext cx="0" cy="0"/>
+          <a:chOff x="0" y="0"/>
+          <a:chExt cx="0" cy="0"/>
+        </a:xfrm>
+      </p:grpSpPr>
+      <p:sp>
+        <p:nvSpPr>
+          <p:cNvPr id="3" name="Subtitle 2">
+            <a:extLst>
+              <a:ext uri="{FF2B5EF4-FFF2-40B4-BE49-F238E27FC236}">
+                <a16:creationId xmlns:a16="http://schemas.microsoft.com/office/drawing/2014/main" id="{A1157D90-FE36-01B1-D30B-2F2F0D3F32CB}"/>
+              </a:ext>
+            </a:extLst>
+          </p:cNvPr>
+          <p:cNvSpPr>
+            <a:spLocks noGrp="1"/>
+          </p:cNvSpPr>
+          <p:nvPr>
+            <p:ph type="subTitle" idx="1"/>
+          </p:nvPr>
+        </p:nvSpPr>
+        <p:spPr>
+          <a:xfrm>
+            <a:off x="84221" y="213360"/>
+            <a:ext cx="8891337" cy="6416040"/>
+          </a:xfrm>
+        </p:spPr>
+        <p:txBody>
+          <a:bodyPr>
+            <a:noAutofit/>
+          </a:bodyPr>
+          <a:lstStyle/>
+          <a:p>
+            <a:endParaRPr lang="en-US" sz="5400" dirty="0">
+              <a:solidFill>
+                <a:schemeClr val="bg1"/>
+              </a:solidFill>
+              <a:latin typeface="Avenir Medium" panose="02000503020000020003" pitchFamily="2" charset="0"/>
+              <a:ea typeface="Bodoni Ornaments" pitchFamily="2" charset="0"/>
+            </a:endParaRPr>
+          </a:p>
+          <a:p>
+            <a:r>
+              <a:rPr lang="en-US" sz="5400" dirty="0">
+                <a:solidFill>
+                  <a:schemeClr val="bg1"/>
+                </a:solidFill>
+                <a:latin typeface="Avenir Medium" panose="02000503020000020003" pitchFamily="2" charset="0"/>
+                <a:ea typeface="Bodoni Ornaments" pitchFamily="2" charset="0"/>
+              </a:rPr>
+              <a:t>On Christ the solid rock </a:t>
+            </a:r>
+          </a:p>
+          <a:p>
+            <a:r>
+              <a:rPr lang="en-US" sz="5400" dirty="0">
+                <a:solidFill>
+                  <a:schemeClr val="bg1"/>
+                </a:solidFill>
+                <a:latin typeface="Avenir Medium" panose="02000503020000020003" pitchFamily="2" charset="0"/>
+                <a:ea typeface="Bodoni Ornaments" pitchFamily="2" charset="0"/>
+              </a:rPr>
+              <a:t>I stand</a:t>
+            </a:r>
+          </a:p>
+          <a:p>
+            <a:endParaRPr lang="en-US" sz="5400" dirty="0">
+              <a:solidFill>
+                <a:schemeClr val="bg1"/>
+              </a:solidFill>
+              <a:latin typeface="Avenir Medium" panose="02000503020000020003" pitchFamily="2" charset="0"/>
+              <a:ea typeface="Bodoni Ornaments" pitchFamily="2" charset="0"/>
+            </a:endParaRPr>
+          </a:p>
+          <a:p>
+            <a:r>
+              <a:rPr lang="en-US" sz="5400" dirty="0">
+                <a:solidFill>
+                  <a:schemeClr val="bg1"/>
+                </a:solidFill>
+                <a:latin typeface="Avenir Medium" panose="02000503020000020003" pitchFamily="2" charset="0"/>
+                <a:ea typeface="Bodoni Ornaments" pitchFamily="2" charset="0"/>
+              </a:rPr>
+              <a:t>All other ground is </a:t>
+            </a:r>
+          </a:p>
+          <a:p>
+            <a:r>
+              <a:rPr lang="en-US" sz="5400" dirty="0">
+                <a:solidFill>
+                  <a:schemeClr val="bg1"/>
+                </a:solidFill>
+                <a:latin typeface="Avenir Medium" panose="02000503020000020003" pitchFamily="2" charset="0"/>
+                <a:ea typeface="Bodoni Ornaments" pitchFamily="2" charset="0"/>
+              </a:rPr>
+              <a:t>sinking sand</a:t>
+            </a:r>
+          </a:p>
+        </p:txBody>
+      </p:sp>
+    </p:spTree>
+    <p:extLst>
+      <p:ext uri="{BB962C8B-B14F-4D97-AF65-F5344CB8AC3E}">
+        <p14:creationId xmlns:p14="http://schemas.microsoft.com/office/powerpoint/2010/main" val="3056050793"/>
+      </p:ext>
+    </p:extLst>
+  </p:cSld>
+  <p:clrMapOvr>
+    <a:masterClrMapping/>
+  </p:clrMapOvr>
+</p:sld>
+</file>
+
 <file path=ppt/slides/slide2.xml><?xml version="1.0" encoding="utf-8"?>
 <p:sld xmlns:a="http://schemas.openxmlformats.org/drawingml/2006/main" xmlns:r="http://schemas.openxmlformats.org/officeDocument/2006/relationships" xmlns:p="http://schemas.openxmlformats.org/presentationml/2006/main">
   <p:cSld>
@@ -3194,7 +3618,7 @@
           </a:bodyPr>
           <a:lstStyle/>
           <a:p>
-            <a:endParaRPr lang="en-US" sz="4000" dirty="0">
+            <a:endParaRPr lang="en-US" sz="5400" dirty="0">
               <a:solidFill>
                 <a:schemeClr val="bg1"/>
               </a:solidFill>
@@ -3204,19 +3628,31 @@
           </a:p>
           <a:p>
             <a:r>
-              <a:rPr lang="en-US" sz="4000" dirty="0">
+              <a:rPr lang="en-US" sz="5400" dirty="0">
                 <a:solidFill>
                   <a:schemeClr val="bg1"/>
                 </a:solidFill>
                 <a:latin typeface="Avenir Medium" panose="02000503020000020003" pitchFamily="2" charset="0"/>
                 <a:ea typeface="Bodoni Ornaments" pitchFamily="2" charset="0"/>
               </a:rPr>
-              <a:t>My hope is built on nothing less</a:t>
-            </a:r>
-          </a:p>
-          <a:p>
-            <a:r>
-              <a:rPr lang="en-US" sz="4000" dirty="0">
+              <a:t>My hope is built on </a:t>
+            </a:r>
+          </a:p>
+          <a:p>
+            <a:r>
+              <a:rPr lang="en-US" sz="5400" dirty="0">
+                <a:solidFill>
+                  <a:schemeClr val="bg1"/>
+                </a:solidFill>
+                <a:latin typeface="Avenir Medium" panose="02000503020000020003" pitchFamily="2" charset="0"/>
+                <a:ea typeface="Bodoni Ornaments" pitchFamily="2" charset="0"/>
+              </a:rPr>
+              <a:t>nothing less</a:t>
+            </a:r>
+          </a:p>
+          <a:p>
+            <a:r>
+              <a:rPr lang="en-US" sz="5400" dirty="0">
                 <a:solidFill>
                   <a:schemeClr val="bg1"/>
                 </a:solidFill>
@@ -3228,7 +3664,7 @@
           </a:p>
           <a:p>
             <a:r>
-              <a:rPr lang="en-US" sz="4000" dirty="0">
+              <a:rPr lang="en-US" sz="5400" dirty="0">
                 <a:solidFill>
                   <a:schemeClr val="bg1"/>
                 </a:solidFill>
@@ -3239,7 +3675,7 @@
             </a:r>
           </a:p>
           <a:p>
-            <a:endParaRPr lang="en-US" sz="4000" dirty="0">
+            <a:endParaRPr lang="en-US" sz="5400" dirty="0">
               <a:solidFill>
                 <a:schemeClr val="bg1"/>
               </a:solidFill>
@@ -3248,31 +3684,7 @@
             </a:endParaRPr>
           </a:p>
           <a:p>
-            <a:r>
-              <a:rPr lang="en-US" sz="4000" dirty="0">
-                <a:solidFill>
-                  <a:schemeClr val="bg1"/>
-                </a:solidFill>
-                <a:latin typeface="Avenir Medium" panose="02000503020000020003" pitchFamily="2" charset="0"/>
-                <a:ea typeface="Bodoni Ornaments" pitchFamily="2" charset="0"/>
-              </a:rPr>
-              <a:t>I dare not trust the sweetest frame</a:t>
-            </a:r>
-          </a:p>
-          <a:p>
-            <a:r>
-              <a:rPr lang="en-US" sz="4000" dirty="0">
-                <a:solidFill>
-                  <a:schemeClr val="bg1"/>
-                </a:solidFill>
-                <a:latin typeface="Avenir Medium" panose="02000503020000020003" pitchFamily="2" charset="0"/>
-                <a:ea typeface="Bodoni Ornaments" pitchFamily="2" charset="0"/>
-              </a:rPr>
-              <a:t>But wholly lean on Jesus' name</a:t>
-            </a:r>
-          </a:p>
-          <a:p>
-            <a:endParaRPr lang="en-US" sz="4000" dirty="0">
+            <a:endParaRPr lang="en-US" sz="5400" dirty="0">
               <a:solidFill>
                 <a:schemeClr val="bg1"/>
               </a:solidFill>
@@ -3296,6 +3708,142 @@
 </file>
 
 <file path=ppt/slides/slide3.xml><?xml version="1.0" encoding="utf-8"?>
+<p:sld xmlns:a="http://schemas.openxmlformats.org/drawingml/2006/main" xmlns:r="http://schemas.openxmlformats.org/officeDocument/2006/relationships" xmlns:p="http://schemas.openxmlformats.org/presentationml/2006/main">
+  <p:cSld>
+    <p:bg>
+      <p:bgPr>
+        <a:solidFill>
+          <a:schemeClr val="tx1"/>
+        </a:solidFill>
+        <a:effectLst/>
+      </p:bgPr>
+    </p:bg>
+    <p:spTree>
+      <p:nvGrpSpPr>
+        <p:cNvPr id="1" name="">
+          <a:extLst>
+            <a:ext uri="{FF2B5EF4-FFF2-40B4-BE49-F238E27FC236}">
+              <a16:creationId xmlns:a16="http://schemas.microsoft.com/office/drawing/2014/main" id="{AD0C2B0A-CE77-C9BA-EF3A-91528833DA21}"/>
+            </a:ext>
+          </a:extLst>
+        </p:cNvPr>
+        <p:cNvGrpSpPr/>
+        <p:nvPr/>
+      </p:nvGrpSpPr>
+      <p:grpSpPr>
+        <a:xfrm>
+          <a:off x="0" y="0"/>
+          <a:ext cx="0" cy="0"/>
+          <a:chOff x="0" y="0"/>
+          <a:chExt cx="0" cy="0"/>
+        </a:xfrm>
+      </p:grpSpPr>
+      <p:sp>
+        <p:nvSpPr>
+          <p:cNvPr id="3" name="Subtitle 2">
+            <a:extLst>
+              <a:ext uri="{FF2B5EF4-FFF2-40B4-BE49-F238E27FC236}">
+                <a16:creationId xmlns:a16="http://schemas.microsoft.com/office/drawing/2014/main" id="{04EC95FA-398B-2EED-A1C4-887BD6E988B1}"/>
+              </a:ext>
+            </a:extLst>
+          </p:cNvPr>
+          <p:cNvSpPr>
+            <a:spLocks noGrp="1"/>
+          </p:cNvSpPr>
+          <p:nvPr>
+            <p:ph type="subTitle" idx="1"/>
+          </p:nvPr>
+        </p:nvSpPr>
+        <p:spPr>
+          <a:xfrm>
+            <a:off x="84221" y="213360"/>
+            <a:ext cx="8891337" cy="6416040"/>
+          </a:xfrm>
+        </p:spPr>
+        <p:txBody>
+          <a:bodyPr>
+            <a:noAutofit/>
+          </a:bodyPr>
+          <a:lstStyle/>
+          <a:p>
+            <a:endParaRPr lang="en-US" sz="5400" dirty="0">
+              <a:solidFill>
+                <a:schemeClr val="bg1"/>
+              </a:solidFill>
+              <a:latin typeface="Avenir Medium" panose="02000503020000020003" pitchFamily="2" charset="0"/>
+              <a:ea typeface="Bodoni Ornaments" pitchFamily="2" charset="0"/>
+            </a:endParaRPr>
+          </a:p>
+          <a:p>
+            <a:r>
+              <a:rPr lang="en-US" sz="5400" dirty="0">
+                <a:solidFill>
+                  <a:schemeClr val="bg1"/>
+                </a:solidFill>
+                <a:latin typeface="Avenir Medium" panose="02000503020000020003" pitchFamily="2" charset="0"/>
+                <a:ea typeface="Bodoni Ornaments" pitchFamily="2" charset="0"/>
+              </a:rPr>
+              <a:t>I dare not trust the sweetest frame</a:t>
+            </a:r>
+          </a:p>
+          <a:p>
+            <a:endParaRPr lang="en-US" sz="5400" dirty="0">
+              <a:solidFill>
+                <a:schemeClr val="bg1"/>
+              </a:solidFill>
+              <a:latin typeface="Avenir Medium" panose="02000503020000020003" pitchFamily="2" charset="0"/>
+              <a:ea typeface="Bodoni Ornaments" pitchFamily="2" charset="0"/>
+            </a:endParaRPr>
+          </a:p>
+          <a:p>
+            <a:r>
+              <a:rPr lang="en-US" sz="5400" dirty="0">
+                <a:solidFill>
+                  <a:schemeClr val="bg1"/>
+                </a:solidFill>
+                <a:latin typeface="Avenir Medium" panose="02000503020000020003" pitchFamily="2" charset="0"/>
+                <a:ea typeface="Bodoni Ornaments" pitchFamily="2" charset="0"/>
+              </a:rPr>
+              <a:t>But wholly lean on </a:t>
+            </a:r>
+          </a:p>
+          <a:p>
+            <a:r>
+              <a:rPr lang="en-US" sz="5400" dirty="0">
+                <a:solidFill>
+                  <a:schemeClr val="bg1"/>
+                </a:solidFill>
+                <a:latin typeface="Avenir Medium" panose="02000503020000020003" pitchFamily="2" charset="0"/>
+                <a:ea typeface="Bodoni Ornaments" pitchFamily="2" charset="0"/>
+              </a:rPr>
+              <a:t>Jesus' name</a:t>
+            </a:r>
+          </a:p>
+          <a:p>
+            <a:endParaRPr lang="en-US" sz="5400" dirty="0">
+              <a:solidFill>
+                <a:schemeClr val="bg1"/>
+              </a:solidFill>
+              <a:latin typeface="Avenir Medium" panose="02000503020000020003" pitchFamily="2" charset="0"/>
+              <a:ea typeface="Bodoni Ornaments" pitchFamily="2" charset="0"/>
+            </a:endParaRPr>
+          </a:p>
+        </p:txBody>
+      </p:sp>
+    </p:spTree>
+    <p:extLst>
+      <p:ext uri="{BB962C8B-B14F-4D97-AF65-F5344CB8AC3E}">
+        <p14:creationId xmlns:p14="http://schemas.microsoft.com/office/powerpoint/2010/main" val="551591496"/>
+      </p:ext>
+    </p:extLst>
+  </p:cSld>
+  <p:clrMapOvr>
+    <a:masterClrMapping/>
+  </p:clrMapOvr>
+</p:sld>
+</file>
+
+<file path=ppt/slides/slide4.xml><?xml version="1.0" encoding="utf-8"?>
 <p:sld xmlns:a="http://schemas.openxmlformats.org/drawingml/2006/main" xmlns:r="http://schemas.openxmlformats.org/officeDocument/2006/relationships" xmlns:p="http://schemas.openxmlformats.org/presentationml/2006/main">
   <p:cSld>
     <p:bg>
@@ -3354,7 +3902,7 @@
           </a:bodyPr>
           <a:lstStyle/>
           <a:p>
-            <a:endParaRPr lang="en-US" sz="4000" dirty="0">
+            <a:endParaRPr lang="en-US" sz="5400" dirty="0">
               <a:solidFill>
                 <a:schemeClr val="bg1"/>
               </a:solidFill>
@@ -3364,7 +3912,7 @@
           </a:p>
           <a:p>
             <a:r>
-              <a:rPr lang="en-US" sz="4000" dirty="0">
+              <a:rPr lang="en-US" sz="5400" dirty="0">
                 <a:solidFill>
                   <a:schemeClr val="bg1"/>
                 </a:solidFill>
@@ -3376,7 +3924,7 @@
           </a:p>
           <a:p>
             <a:r>
-              <a:rPr lang="en-US" sz="4000" dirty="0">
+              <a:rPr lang="en-US" sz="5400" dirty="0">
                 <a:solidFill>
                   <a:schemeClr val="bg1"/>
                 </a:solidFill>
@@ -3387,19 +3935,7 @@
             </a:r>
           </a:p>
           <a:p>
-            <a:r>
-              <a:rPr lang="en-US" sz="4000" dirty="0">
-                <a:solidFill>
-                  <a:schemeClr val="bg1"/>
-                </a:solidFill>
-                <a:latin typeface="Avenir Medium" panose="02000503020000020003" pitchFamily="2" charset="0"/>
-                <a:ea typeface="Bodoni Ornaments" pitchFamily="2" charset="0"/>
-              </a:rPr>
-              <a:t>I rest on his unchanging grace</a:t>
-            </a:r>
-          </a:p>
-          <a:p>
-            <a:endParaRPr lang="en-US" sz="4000" dirty="0">
+            <a:endParaRPr lang="en-US" sz="5400" dirty="0">
               <a:solidFill>
                 <a:schemeClr val="bg1"/>
               </a:solidFill>
@@ -3409,27 +3945,24 @@
           </a:p>
           <a:p>
             <a:r>
-              <a:rPr lang="en-US" sz="4000" dirty="0">
+              <a:rPr lang="en-US" sz="5400" dirty="0">
                 <a:solidFill>
                   <a:schemeClr val="bg1"/>
                 </a:solidFill>
                 <a:latin typeface="Avenir Medium" panose="02000503020000020003" pitchFamily="2" charset="0"/>
                 <a:ea typeface="Bodoni Ornaments" pitchFamily="2" charset="0"/>
               </a:rPr>
-              <a:t>In every high and stormy gale</a:t>
-            </a:r>
-          </a:p>
-          <a:p>
-            <a:r>
-              <a:rPr lang="en-US" sz="4000" dirty="0">
-                <a:solidFill>
-                  <a:schemeClr val="bg1"/>
-                </a:solidFill>
-                <a:latin typeface="Avenir Medium" panose="02000503020000020003" pitchFamily="2" charset="0"/>
-                <a:ea typeface="Bodoni Ornaments" pitchFamily="2" charset="0"/>
-              </a:rPr>
-              <a:t>My anchor holds within the veil</a:t>
-            </a:r>
+              <a:t>I rest on his unchanging grace</a:t>
+            </a:r>
+          </a:p>
+          <a:p>
+            <a:endParaRPr lang="en-US" sz="5400" dirty="0">
+              <a:solidFill>
+                <a:schemeClr val="bg1"/>
+              </a:solidFill>
+              <a:latin typeface="Avenir Medium" panose="02000503020000020003" pitchFamily="2" charset="0"/>
+              <a:ea typeface="Bodoni Ornaments" pitchFamily="2" charset="0"/>
+            </a:endParaRPr>
           </a:p>
         </p:txBody>
       </p:sp>
@@ -3446,7 +3979,153 @@
 </p:sld>
 </file>
 
-<file path=ppt/slides/slide4.xml><?xml version="1.0" encoding="utf-8"?>
+<file path=ppt/slides/slide5.xml><?xml version="1.0" encoding="utf-8"?>
+<p:sld xmlns:a="http://schemas.openxmlformats.org/drawingml/2006/main" xmlns:r="http://schemas.openxmlformats.org/officeDocument/2006/relationships" xmlns:p="http://schemas.openxmlformats.org/presentationml/2006/main">
+  <p:cSld>
+    <p:bg>
+      <p:bgPr>
+        <a:solidFill>
+          <a:schemeClr val="tx1"/>
+        </a:solidFill>
+        <a:effectLst/>
+      </p:bgPr>
+    </p:bg>
+    <p:spTree>
+      <p:nvGrpSpPr>
+        <p:cNvPr id="1" name="">
+          <a:extLst>
+            <a:ext uri="{FF2B5EF4-FFF2-40B4-BE49-F238E27FC236}">
+              <a16:creationId xmlns:a16="http://schemas.microsoft.com/office/drawing/2014/main" id="{ED6BFC1E-3546-C2A5-FC74-2064239A3982}"/>
+            </a:ext>
+          </a:extLst>
+        </p:cNvPr>
+        <p:cNvGrpSpPr/>
+        <p:nvPr/>
+      </p:nvGrpSpPr>
+      <p:grpSpPr>
+        <a:xfrm>
+          <a:off x="0" y="0"/>
+          <a:ext cx="0" cy="0"/>
+          <a:chOff x="0" y="0"/>
+          <a:chExt cx="0" cy="0"/>
+        </a:xfrm>
+      </p:grpSpPr>
+      <p:sp>
+        <p:nvSpPr>
+          <p:cNvPr id="3" name="Subtitle 2">
+            <a:extLst>
+              <a:ext uri="{FF2B5EF4-FFF2-40B4-BE49-F238E27FC236}">
+                <a16:creationId xmlns:a16="http://schemas.microsoft.com/office/drawing/2014/main" id="{22511DB7-521E-A9CD-1231-751BB54346AB}"/>
+              </a:ext>
+            </a:extLst>
+          </p:cNvPr>
+          <p:cNvSpPr>
+            <a:spLocks noGrp="1"/>
+          </p:cNvSpPr>
+          <p:nvPr>
+            <p:ph type="subTitle" idx="1"/>
+          </p:nvPr>
+        </p:nvSpPr>
+        <p:spPr>
+          <a:xfrm>
+            <a:off x="84221" y="213360"/>
+            <a:ext cx="8891337" cy="6416040"/>
+          </a:xfrm>
+        </p:spPr>
+        <p:txBody>
+          <a:bodyPr>
+            <a:noAutofit/>
+          </a:bodyPr>
+          <a:lstStyle/>
+          <a:p>
+            <a:endParaRPr lang="en-US" sz="5400" dirty="0">
+              <a:solidFill>
+                <a:schemeClr val="bg1"/>
+              </a:solidFill>
+              <a:latin typeface="Avenir Medium" panose="02000503020000020003" pitchFamily="2" charset="0"/>
+              <a:ea typeface="Bodoni Ornaments" pitchFamily="2" charset="0"/>
+            </a:endParaRPr>
+          </a:p>
+          <a:p>
+            <a:r>
+              <a:rPr lang="en-US" sz="5400" dirty="0">
+                <a:solidFill>
+                  <a:schemeClr val="bg1"/>
+                </a:solidFill>
+                <a:latin typeface="Avenir Medium" panose="02000503020000020003" pitchFamily="2" charset="0"/>
+                <a:ea typeface="Bodoni Ornaments" pitchFamily="2" charset="0"/>
+              </a:rPr>
+              <a:t>In every high and </a:t>
+            </a:r>
+          </a:p>
+          <a:p>
+            <a:r>
+              <a:rPr lang="en-US" sz="5400" dirty="0">
+                <a:solidFill>
+                  <a:schemeClr val="bg1"/>
+                </a:solidFill>
+                <a:latin typeface="Avenir Medium" panose="02000503020000020003" pitchFamily="2" charset="0"/>
+                <a:ea typeface="Bodoni Ornaments" pitchFamily="2" charset="0"/>
+              </a:rPr>
+              <a:t>stormy gale</a:t>
+            </a:r>
+          </a:p>
+          <a:p>
+            <a:endParaRPr lang="en-US" sz="5400" dirty="0">
+              <a:solidFill>
+                <a:schemeClr val="bg1"/>
+              </a:solidFill>
+              <a:latin typeface="Avenir Medium" panose="02000503020000020003" pitchFamily="2" charset="0"/>
+              <a:ea typeface="Bodoni Ornaments" pitchFamily="2" charset="0"/>
+            </a:endParaRPr>
+          </a:p>
+          <a:p>
+            <a:r>
+              <a:rPr lang="en-US" sz="5400" dirty="0">
+                <a:solidFill>
+                  <a:schemeClr val="bg1"/>
+                </a:solidFill>
+                <a:latin typeface="Avenir Medium" panose="02000503020000020003" pitchFamily="2" charset="0"/>
+                <a:ea typeface="Bodoni Ornaments" pitchFamily="2" charset="0"/>
+              </a:rPr>
+              <a:t>My anchor holds </a:t>
+            </a:r>
+            <a:br>
+              <a:rPr lang="en-US" sz="5400" dirty="0">
+                <a:solidFill>
+                  <a:schemeClr val="bg1"/>
+                </a:solidFill>
+                <a:latin typeface="Avenir Medium" panose="02000503020000020003" pitchFamily="2" charset="0"/>
+                <a:ea typeface="Bodoni Ornaments" pitchFamily="2" charset="0"/>
+              </a:rPr>
+            </a:br>
+            <a:r>
+              <a:rPr lang="en-US" sz="5400" dirty="0">
+                <a:solidFill>
+                  <a:schemeClr val="bg1"/>
+                </a:solidFill>
+                <a:latin typeface="Avenir Medium" panose="02000503020000020003" pitchFamily="2" charset="0"/>
+                <a:ea typeface="Bodoni Ornaments" pitchFamily="2" charset="0"/>
+              </a:rPr>
+              <a:t>within the veil</a:t>
+            </a:r>
+          </a:p>
+        </p:txBody>
+      </p:sp>
+    </p:spTree>
+    <p:extLst>
+      <p:ext uri="{BB962C8B-B14F-4D97-AF65-F5344CB8AC3E}">
+        <p14:creationId xmlns:p14="http://schemas.microsoft.com/office/powerpoint/2010/main" val="2120386461"/>
+      </p:ext>
+    </p:extLst>
+  </p:cSld>
+  <p:clrMapOvr>
+    <a:masterClrMapping/>
+  </p:clrMapOvr>
+</p:sld>
+</file>
+
+<file path=ppt/slides/slide6.xml><?xml version="1.0" encoding="utf-8"?>
 <p:sld xmlns:a="http://schemas.openxmlformats.org/drawingml/2006/main" xmlns:r="http://schemas.openxmlformats.org/officeDocument/2006/relationships" xmlns:p="http://schemas.openxmlformats.org/presentationml/2006/main">
   <p:cSld>
     <p:bg>
@@ -3505,7 +4184,7 @@
           </a:bodyPr>
           <a:lstStyle/>
           <a:p>
-            <a:endParaRPr lang="en-US" sz="4000" dirty="0">
+            <a:endParaRPr lang="en-US" sz="5400" dirty="0">
               <a:solidFill>
                 <a:schemeClr val="bg1"/>
               </a:solidFill>
@@ -3514,7 +4193,31 @@
             </a:endParaRPr>
           </a:p>
           <a:p>
-            <a:endParaRPr lang="en-US" sz="4000" dirty="0">
+            <a:r>
+              <a:rPr lang="en-US" sz="5400" dirty="0">
+                <a:solidFill>
+                  <a:schemeClr val="bg1"/>
+                </a:solidFill>
+                <a:latin typeface="Avenir Medium" panose="02000503020000020003" pitchFamily="2" charset="0"/>
+                <a:ea typeface="Bodoni Ornaments" pitchFamily="2" charset="0"/>
+              </a:rPr>
+              <a:t>On Christ the solid rock </a:t>
+            </a:r>
+          </a:p>
+          <a:p>
+            <a:r>
+              <a:rPr lang="en-US" sz="5400" dirty="0">
+                <a:solidFill>
+                  <a:schemeClr val="bg1"/>
+                </a:solidFill>
+                <a:latin typeface="Avenir Medium" panose="02000503020000020003" pitchFamily="2" charset="0"/>
+                <a:ea typeface="Bodoni Ornaments" pitchFamily="2" charset="0"/>
+              </a:rPr>
+              <a:t>I stand</a:t>
+            </a:r>
+          </a:p>
+          <a:p>
+            <a:endParaRPr lang="en-US" sz="5400" dirty="0">
               <a:solidFill>
                 <a:schemeClr val="bg1"/>
               </a:solidFill>
@@ -3524,38 +4227,26 @@
           </a:p>
           <a:p>
             <a:r>
-              <a:rPr lang="en-US" sz="4000" dirty="0">
+              <a:rPr lang="en-US" sz="5400" dirty="0">
                 <a:solidFill>
                   <a:schemeClr val="bg1"/>
                 </a:solidFill>
                 <a:latin typeface="Avenir Medium" panose="02000503020000020003" pitchFamily="2" charset="0"/>
                 <a:ea typeface="Bodoni Ornaments" pitchFamily="2" charset="0"/>
               </a:rPr>
-              <a:t>On Christ the solid rock I stand</a:t>
-            </a:r>
-          </a:p>
-          <a:p>
-            <a:r>
-              <a:rPr lang="en-US" sz="4000" dirty="0">
+              <a:t>All other ground is </a:t>
+            </a:r>
+          </a:p>
+          <a:p>
+            <a:r>
+              <a:rPr lang="en-US" sz="5400" dirty="0">
                 <a:solidFill>
                   <a:schemeClr val="bg1"/>
                 </a:solidFill>
                 <a:latin typeface="Avenir Medium" panose="02000503020000020003" pitchFamily="2" charset="0"/>
                 <a:ea typeface="Bodoni Ornaments" pitchFamily="2" charset="0"/>
               </a:rPr>
-              <a:t>All other ground is sinking sand</a:t>
-            </a:r>
-          </a:p>
-          <a:p>
-            <a:r>
-              <a:rPr lang="en-US" sz="4000" dirty="0">
-                <a:solidFill>
-                  <a:schemeClr val="bg1"/>
-                </a:solidFill>
-                <a:latin typeface="Avenir Medium" panose="02000503020000020003" pitchFamily="2" charset="0"/>
-                <a:ea typeface="Bodoni Ornaments" pitchFamily="2" charset="0"/>
-              </a:rPr>
-              <a:t>All other ground is sinking sand</a:t>
+              <a:t>sinking sand</a:t>
             </a:r>
           </a:p>
         </p:txBody>
@@ -3573,7 +4264,7 @@
 </p:sld>
 </file>
 
-<file path=ppt/slides/slide5.xml><?xml version="1.0" encoding="utf-8"?>
+<file path=ppt/slides/slide7.xml><?xml version="1.0" encoding="utf-8"?>
 <p:sld xmlns:a="http://schemas.openxmlformats.org/drawingml/2006/main" xmlns:r="http://schemas.openxmlformats.org/officeDocument/2006/relationships" xmlns:p="http://schemas.openxmlformats.org/presentationml/2006/main">
   <p:cSld>
     <p:bg>
@@ -3632,7 +4323,7 @@
           </a:bodyPr>
           <a:lstStyle/>
           <a:p>
-            <a:endParaRPr lang="en-US" sz="4000" dirty="0">
+            <a:endParaRPr lang="en-US" sz="5400" dirty="0">
               <a:solidFill>
                 <a:schemeClr val="bg1"/>
               </a:solidFill>
@@ -3642,30 +4333,30 @@
           </a:p>
           <a:p>
             <a:r>
-              <a:rPr lang="en-US" sz="4000" dirty="0">
+              <a:rPr lang="en-US" sz="5400" dirty="0">
                 <a:solidFill>
                   <a:schemeClr val="bg1"/>
                 </a:solidFill>
                 <a:latin typeface="Avenir Medium" panose="02000503020000020003" pitchFamily="2" charset="0"/>
                 <a:ea typeface="Bodoni Ornaments" pitchFamily="2" charset="0"/>
               </a:rPr>
-              <a:t>His oath His covenant His blood</a:t>
-            </a:r>
-          </a:p>
-          <a:p>
-            <a:r>
-              <a:rPr lang="en-US" sz="4000" dirty="0">
+              <a:t>His oath His covenant </a:t>
+            </a:r>
+          </a:p>
+          <a:p>
+            <a:r>
+              <a:rPr lang="en-US" sz="5400" dirty="0">
                 <a:solidFill>
                   <a:schemeClr val="bg1"/>
                 </a:solidFill>
                 <a:latin typeface="Avenir Medium" panose="02000503020000020003" pitchFamily="2" charset="0"/>
                 <a:ea typeface="Bodoni Ornaments" pitchFamily="2" charset="0"/>
               </a:rPr>
-              <a:t>Support me in the whelming flood</a:t>
-            </a:r>
-          </a:p>
-          <a:p>
-            <a:endParaRPr lang="en-US" sz="4000" dirty="0">
+              <a:t>His blood</a:t>
+            </a:r>
+          </a:p>
+          <a:p>
+            <a:endParaRPr lang="en-US" sz="5400" dirty="0">
               <a:solidFill>
                 <a:schemeClr val="bg1"/>
               </a:solidFill>
@@ -3675,30 +4366,18 @@
           </a:p>
           <a:p>
             <a:r>
-              <a:rPr lang="en-US" sz="4000" dirty="0">
+              <a:rPr lang="en-US" sz="5400" dirty="0">
                 <a:solidFill>
                   <a:schemeClr val="bg1"/>
                 </a:solidFill>
                 <a:latin typeface="Avenir Medium" panose="02000503020000020003" pitchFamily="2" charset="0"/>
                 <a:ea typeface="Bodoni Ornaments" pitchFamily="2" charset="0"/>
               </a:rPr>
-              <a:t>When all around my soul gives way</a:t>
-            </a:r>
-          </a:p>
-          <a:p>
-            <a:r>
-              <a:rPr lang="en-US" sz="4000" dirty="0">
-                <a:solidFill>
-                  <a:schemeClr val="bg1"/>
-                </a:solidFill>
-                <a:latin typeface="Avenir Medium" panose="02000503020000020003" pitchFamily="2" charset="0"/>
-                <a:ea typeface="Bodoni Ornaments" pitchFamily="2" charset="0"/>
-              </a:rPr>
-              <a:t>He then is all my hope and stay</a:t>
-            </a:r>
-          </a:p>
-          <a:p>
-            <a:endParaRPr lang="en-US" sz="4000" dirty="0">
+              <a:t>Support me in the whelming flood</a:t>
+            </a:r>
+          </a:p>
+          <a:p>
+            <a:endParaRPr lang="en-US" sz="5400" dirty="0">
               <a:solidFill>
                 <a:schemeClr val="bg1"/>
               </a:solidFill>
@@ -3706,81 +4385,8 @@
               <a:ea typeface="Bodoni Ornaments" pitchFamily="2" charset="0"/>
             </a:endParaRPr>
           </a:p>
-        </p:txBody>
-      </p:sp>
-    </p:spTree>
-    <p:extLst>
-      <p:ext uri="{BB962C8B-B14F-4D97-AF65-F5344CB8AC3E}">
-        <p14:creationId xmlns:p14="http://schemas.microsoft.com/office/powerpoint/2010/main" val="1728387045"/>
-      </p:ext>
-    </p:extLst>
-  </p:cSld>
-  <p:clrMapOvr>
-    <a:masterClrMapping/>
-  </p:clrMapOvr>
-</p:sld>
-</file>
-
-<file path=ppt/slides/slide6.xml><?xml version="1.0" encoding="utf-8"?>
-<p:sld xmlns:a="http://schemas.openxmlformats.org/drawingml/2006/main" xmlns:r="http://schemas.openxmlformats.org/officeDocument/2006/relationships" xmlns:p="http://schemas.openxmlformats.org/presentationml/2006/main">
-  <p:cSld>
-    <p:bg>
-      <p:bgPr>
-        <a:solidFill>
-          <a:schemeClr val="tx1"/>
-        </a:solidFill>
-        <a:effectLst/>
-      </p:bgPr>
-    </p:bg>
-    <p:spTree>
-      <p:nvGrpSpPr>
-        <p:cNvPr id="1" name="">
-          <a:extLst>
-            <a:ext uri="{FF2B5EF4-FFF2-40B4-BE49-F238E27FC236}">
-              <a16:creationId xmlns:a16="http://schemas.microsoft.com/office/drawing/2014/main" id="{F3F1D68F-661E-544F-2622-BDC01EDD7E66}"/>
-            </a:ext>
-          </a:extLst>
-        </p:cNvPr>
-        <p:cNvGrpSpPr/>
-        <p:nvPr/>
-      </p:nvGrpSpPr>
-      <p:grpSpPr>
-        <a:xfrm>
-          <a:off x="0" y="0"/>
-          <a:ext cx="0" cy="0"/>
-          <a:chOff x="0" y="0"/>
-          <a:chExt cx="0" cy="0"/>
-        </a:xfrm>
-      </p:grpSpPr>
-      <p:sp>
-        <p:nvSpPr>
-          <p:cNvPr id="3" name="Subtitle 2">
-            <a:extLst>
-              <a:ext uri="{FF2B5EF4-FFF2-40B4-BE49-F238E27FC236}">
-                <a16:creationId xmlns:a16="http://schemas.microsoft.com/office/drawing/2014/main" id="{7CED69C8-254E-3D4D-5A6B-B7E75E367EA6}"/>
-              </a:ext>
-            </a:extLst>
-          </p:cNvPr>
-          <p:cNvSpPr>
-            <a:spLocks noGrp="1"/>
-          </p:cNvSpPr>
-          <p:nvPr>
-            <p:ph type="subTitle" idx="1"/>
-          </p:nvPr>
-        </p:nvSpPr>
-        <p:spPr>
-          <a:xfrm>
-            <a:off x="84221" y="213360"/>
-            <a:ext cx="8891337" cy="6416040"/>
-          </a:xfrm>
-        </p:spPr>
-        <p:txBody>
-          <a:bodyPr>
-            <a:noAutofit/>
-          </a:bodyPr>
-          <a:lstStyle/>
-          <a:p>
-            <a:endParaRPr lang="en-US" sz="4000" dirty="0">
+          <a:p>
+            <a:endParaRPr lang="en-US" sz="5400" dirty="0">
               <a:solidFill>
                 <a:schemeClr val="bg1"/>
               </a:solidFill>
@@ -3788,226 +4394,12 @@
               <a:ea typeface="Bodoni Ornaments" pitchFamily="2" charset="0"/>
             </a:endParaRPr>
           </a:p>
-          <a:p>
-            <a:endParaRPr lang="en-US" sz="4000" dirty="0">
-              <a:solidFill>
-                <a:schemeClr val="bg1"/>
-              </a:solidFill>
-              <a:latin typeface="Avenir Medium" panose="02000503020000020003" pitchFamily="2" charset="0"/>
-              <a:ea typeface="Bodoni Ornaments" pitchFamily="2" charset="0"/>
-            </a:endParaRPr>
-          </a:p>
-          <a:p>
-            <a:r>
-              <a:rPr lang="en-US" sz="4000" dirty="0">
-                <a:solidFill>
-                  <a:schemeClr val="bg1"/>
-                </a:solidFill>
-                <a:latin typeface="Avenir Medium" panose="02000503020000020003" pitchFamily="2" charset="0"/>
-                <a:ea typeface="Bodoni Ornaments" pitchFamily="2" charset="0"/>
-              </a:rPr>
-              <a:t>On Christ the solid rock I stand</a:t>
-            </a:r>
-          </a:p>
-          <a:p>
-            <a:r>
-              <a:rPr lang="en-US" sz="4000" dirty="0">
-                <a:solidFill>
-                  <a:schemeClr val="bg1"/>
-                </a:solidFill>
-                <a:latin typeface="Avenir Medium" panose="02000503020000020003" pitchFamily="2" charset="0"/>
-                <a:ea typeface="Bodoni Ornaments" pitchFamily="2" charset="0"/>
-              </a:rPr>
-              <a:t>All other ground is sinking sand</a:t>
-            </a:r>
-          </a:p>
-          <a:p>
-            <a:r>
-              <a:rPr lang="en-US" sz="4000" dirty="0">
-                <a:solidFill>
-                  <a:schemeClr val="bg1"/>
-                </a:solidFill>
-                <a:latin typeface="Avenir Medium" panose="02000503020000020003" pitchFamily="2" charset="0"/>
-                <a:ea typeface="Bodoni Ornaments" pitchFamily="2" charset="0"/>
-              </a:rPr>
-              <a:t>All other ground is sinking sand</a:t>
-            </a:r>
-          </a:p>
         </p:txBody>
       </p:sp>
     </p:spTree>
     <p:extLst>
       <p:ext uri="{BB962C8B-B14F-4D97-AF65-F5344CB8AC3E}">
-        <p14:creationId xmlns:p14="http://schemas.microsoft.com/office/powerpoint/2010/main" val="2666999026"/>
-      </p:ext>
-    </p:extLst>
-  </p:cSld>
-  <p:clrMapOvr>
-    <a:masterClrMapping/>
-  </p:clrMapOvr>
-</p:sld>
-</file>
-
-<file path=ppt/slides/slide7.xml><?xml version="1.0" encoding="utf-8"?>
-<p:sld xmlns:a="http://schemas.openxmlformats.org/drawingml/2006/main" xmlns:r="http://schemas.openxmlformats.org/officeDocument/2006/relationships" xmlns:p="http://schemas.openxmlformats.org/presentationml/2006/main">
-  <p:cSld>
-    <p:bg>
-      <p:bgPr>
-        <a:solidFill>
-          <a:schemeClr val="tx1"/>
-        </a:solidFill>
-        <a:effectLst/>
-      </p:bgPr>
-    </p:bg>
-    <p:spTree>
-      <p:nvGrpSpPr>
-        <p:cNvPr id="1" name="">
-          <a:extLst>
-            <a:ext uri="{FF2B5EF4-FFF2-40B4-BE49-F238E27FC236}">
-              <a16:creationId xmlns:a16="http://schemas.microsoft.com/office/drawing/2014/main" id="{C722DC9B-A22E-044C-1EAC-0EDEFB8036C4}"/>
-            </a:ext>
-          </a:extLst>
-        </p:cNvPr>
-        <p:cNvGrpSpPr/>
-        <p:nvPr/>
-      </p:nvGrpSpPr>
-      <p:grpSpPr>
-        <a:xfrm>
-          <a:off x="0" y="0"/>
-          <a:ext cx="0" cy="0"/>
-          <a:chOff x="0" y="0"/>
-          <a:chExt cx="0" cy="0"/>
-        </a:xfrm>
-      </p:grpSpPr>
-      <p:sp>
-        <p:nvSpPr>
-          <p:cNvPr id="3" name="Subtitle 2">
-            <a:extLst>
-              <a:ext uri="{FF2B5EF4-FFF2-40B4-BE49-F238E27FC236}">
-                <a16:creationId xmlns:a16="http://schemas.microsoft.com/office/drawing/2014/main" id="{57BE51F2-EF32-9E8B-AA9E-5C4166980B59}"/>
-              </a:ext>
-            </a:extLst>
-          </p:cNvPr>
-          <p:cNvSpPr>
-            <a:spLocks noGrp="1"/>
-          </p:cNvSpPr>
-          <p:nvPr>
-            <p:ph type="subTitle" idx="1"/>
-          </p:nvPr>
-        </p:nvSpPr>
-        <p:spPr>
-          <a:xfrm>
-            <a:off x="84221" y="213360"/>
-            <a:ext cx="8891337" cy="6416040"/>
-          </a:xfrm>
-        </p:spPr>
-        <p:txBody>
-          <a:bodyPr>
-            <a:noAutofit/>
-          </a:bodyPr>
-          <a:lstStyle/>
-          <a:p>
-            <a:endParaRPr lang="en-US" sz="4000" dirty="0">
-              <a:solidFill>
-                <a:schemeClr val="bg1"/>
-              </a:solidFill>
-              <a:latin typeface="Avenir Medium" panose="02000503020000020003" pitchFamily="2" charset="0"/>
-              <a:ea typeface="Bodoni Ornaments" pitchFamily="2" charset="0"/>
-            </a:endParaRPr>
-          </a:p>
-          <a:p>
-            <a:endParaRPr lang="en-US" sz="4000" dirty="0">
-              <a:solidFill>
-                <a:schemeClr val="bg1"/>
-              </a:solidFill>
-              <a:latin typeface="Avenir Medium" panose="02000503020000020003" pitchFamily="2" charset="0"/>
-              <a:ea typeface="Bodoni Ornaments" pitchFamily="2" charset="0"/>
-            </a:endParaRPr>
-          </a:p>
-          <a:p>
-            <a:r>
-              <a:rPr lang="en-US" sz="4000" dirty="0">
-                <a:solidFill>
-                  <a:schemeClr val="bg1"/>
-                </a:solidFill>
-                <a:latin typeface="Avenir Medium" panose="02000503020000020003" pitchFamily="2" charset="0"/>
-                <a:ea typeface="Bodoni Ornaments" pitchFamily="2" charset="0"/>
-              </a:rPr>
-              <a:t>When He shall come with </a:t>
-            </a:r>
-          </a:p>
-          <a:p>
-            <a:r>
-              <a:rPr lang="en-US" sz="4000" dirty="0">
-                <a:solidFill>
-                  <a:schemeClr val="bg1"/>
-                </a:solidFill>
-                <a:latin typeface="Avenir Medium" panose="02000503020000020003" pitchFamily="2" charset="0"/>
-                <a:ea typeface="Bodoni Ornaments" pitchFamily="2" charset="0"/>
-              </a:rPr>
-              <a:t>trumpet sound</a:t>
-            </a:r>
-          </a:p>
-          <a:p>
-            <a:r>
-              <a:rPr lang="en-US" sz="4000" dirty="0">
-                <a:solidFill>
-                  <a:schemeClr val="bg1"/>
-                </a:solidFill>
-                <a:latin typeface="Avenir Medium" panose="02000503020000020003" pitchFamily="2" charset="0"/>
-                <a:ea typeface="Bodoni Ornaments" pitchFamily="2" charset="0"/>
-              </a:rPr>
-              <a:t>Oh may I then in Him be found</a:t>
-            </a:r>
-          </a:p>
-          <a:p>
-            <a:endParaRPr lang="en-US" sz="4000" dirty="0">
-              <a:solidFill>
-                <a:schemeClr val="bg1"/>
-              </a:solidFill>
-              <a:latin typeface="Avenir Medium" panose="02000503020000020003" pitchFamily="2" charset="0"/>
-              <a:ea typeface="Bodoni Ornaments" pitchFamily="2" charset="0"/>
-            </a:endParaRPr>
-          </a:p>
-          <a:p>
-            <a:r>
-              <a:rPr lang="en-US" sz="4000" dirty="0">
-                <a:solidFill>
-                  <a:schemeClr val="bg1"/>
-                </a:solidFill>
-                <a:latin typeface="Avenir Medium" panose="02000503020000020003" pitchFamily="2" charset="0"/>
-                <a:ea typeface="Bodoni Ornaments" pitchFamily="2" charset="0"/>
-              </a:rPr>
-              <a:t>Dressed In His righteousness alone</a:t>
-            </a:r>
-          </a:p>
-          <a:p>
-            <a:r>
-              <a:rPr lang="en-US" sz="4000" dirty="0">
-                <a:solidFill>
-                  <a:schemeClr val="bg1"/>
-                </a:solidFill>
-                <a:latin typeface="Avenir Medium" panose="02000503020000020003" pitchFamily="2" charset="0"/>
-                <a:ea typeface="Bodoni Ornaments" pitchFamily="2" charset="0"/>
-              </a:rPr>
-              <a:t>Faultless to stand before the throne</a:t>
-            </a:r>
-          </a:p>
-          <a:p>
-            <a:endParaRPr lang="en-US" sz="4000" dirty="0">
-              <a:solidFill>
-                <a:schemeClr val="bg1"/>
-              </a:solidFill>
-              <a:latin typeface="Avenir Medium" panose="02000503020000020003" pitchFamily="2" charset="0"/>
-              <a:ea typeface="Bodoni Ornaments" pitchFamily="2" charset="0"/>
-            </a:endParaRPr>
-          </a:p>
-        </p:txBody>
-      </p:sp>
-    </p:spTree>
-    <p:extLst>
-      <p:ext uri="{BB962C8B-B14F-4D97-AF65-F5344CB8AC3E}">
-        <p14:creationId xmlns:p14="http://schemas.microsoft.com/office/powerpoint/2010/main" val="419506062"/>
+        <p14:creationId xmlns:p14="http://schemas.microsoft.com/office/powerpoint/2010/main" val="1728387045"/>
       </p:ext>
     </p:extLst>
   </p:cSld>
@@ -4033,7 +4425,7 @@
         <p:cNvPr id="1" name="">
           <a:extLst>
             <a:ext uri="{FF2B5EF4-FFF2-40B4-BE49-F238E27FC236}">
-              <a16:creationId xmlns:a16="http://schemas.microsoft.com/office/drawing/2014/main" id="{264DC91F-524C-2350-3ABC-EA1FDABF3CE3}"/>
+              <a16:creationId xmlns:a16="http://schemas.microsoft.com/office/drawing/2014/main" id="{5DFEB5C1-3356-1118-4425-FB414A861DC0}"/>
             </a:ext>
           </a:extLst>
         </p:cNvPr>
@@ -4053,7 +4445,7 @@
           <p:cNvPr id="3" name="Subtitle 2">
             <a:extLst>
               <a:ext uri="{FF2B5EF4-FFF2-40B4-BE49-F238E27FC236}">
-                <a16:creationId xmlns:a16="http://schemas.microsoft.com/office/drawing/2014/main" id="{6228237E-0473-6EAE-F241-E938A3EF5842}"/>
+                <a16:creationId xmlns:a16="http://schemas.microsoft.com/office/drawing/2014/main" id="{BB458E5A-E615-442F-800C-93CF05C65857}"/>
               </a:ext>
             </a:extLst>
           </p:cNvPr>
@@ -4076,7 +4468,7 @@
           </a:bodyPr>
           <a:lstStyle/>
           <a:p>
-            <a:endParaRPr lang="en-US" sz="4000" dirty="0">
+            <a:endParaRPr lang="en-US" sz="5400" dirty="0">
               <a:solidFill>
                 <a:schemeClr val="bg1"/>
               </a:solidFill>
@@ -4085,7 +4477,31 @@
             </a:endParaRPr>
           </a:p>
           <a:p>
-            <a:endParaRPr lang="en-US" sz="4000" dirty="0">
+            <a:r>
+              <a:rPr lang="en-US" sz="5400" dirty="0">
+                <a:solidFill>
+                  <a:schemeClr val="bg1"/>
+                </a:solidFill>
+                <a:latin typeface="Avenir Medium" panose="02000503020000020003" pitchFamily="2" charset="0"/>
+                <a:ea typeface="Bodoni Ornaments" pitchFamily="2" charset="0"/>
+              </a:rPr>
+              <a:t>When all around my </a:t>
+            </a:r>
+          </a:p>
+          <a:p>
+            <a:r>
+              <a:rPr lang="en-US" sz="5400" dirty="0">
+                <a:solidFill>
+                  <a:schemeClr val="bg1"/>
+                </a:solidFill>
+                <a:latin typeface="Avenir Medium" panose="02000503020000020003" pitchFamily="2" charset="0"/>
+                <a:ea typeface="Bodoni Ornaments" pitchFamily="2" charset="0"/>
+              </a:rPr>
+              <a:t>soul gives way</a:t>
+            </a:r>
+          </a:p>
+          <a:p>
+            <a:endParaRPr lang="en-US" sz="5400" dirty="0">
               <a:solidFill>
                 <a:schemeClr val="bg1"/>
               </a:solidFill>
@@ -4095,77 +4511,174 @@
           </a:p>
           <a:p>
             <a:r>
-              <a:rPr lang="en-US" sz="4000" dirty="0">
+              <a:rPr lang="en-US" sz="5400" dirty="0">
                 <a:solidFill>
                   <a:schemeClr val="bg1"/>
                 </a:solidFill>
                 <a:latin typeface="Avenir Medium" panose="02000503020000020003" pitchFamily="2" charset="0"/>
                 <a:ea typeface="Bodoni Ornaments" pitchFamily="2" charset="0"/>
               </a:rPr>
-              <a:t>On Christ the solid rock I stand</a:t>
-            </a:r>
-          </a:p>
-          <a:p>
-            <a:r>
-              <a:rPr lang="en-US" sz="4000" dirty="0">
+              <a:t>He then is all my </a:t>
+            </a:r>
+          </a:p>
+          <a:p>
+            <a:r>
+              <a:rPr lang="en-US" sz="5400" dirty="0">
                 <a:solidFill>
                   <a:schemeClr val="bg1"/>
                 </a:solidFill>
                 <a:latin typeface="Avenir Medium" panose="02000503020000020003" pitchFamily="2" charset="0"/>
                 <a:ea typeface="Bodoni Ornaments" pitchFamily="2" charset="0"/>
               </a:rPr>
-              <a:t>All other ground is sinking sand</a:t>
-            </a:r>
-          </a:p>
-          <a:p>
-            <a:r>
-              <a:rPr lang="en-US" sz="4000" dirty="0">
+              <a:t>hope and stay</a:t>
+            </a:r>
+          </a:p>
+          <a:p>
+            <a:endParaRPr lang="en-US" sz="5400" dirty="0">
+              <a:solidFill>
+                <a:schemeClr val="bg1"/>
+              </a:solidFill>
+              <a:latin typeface="Avenir Medium" panose="02000503020000020003" pitchFamily="2" charset="0"/>
+              <a:ea typeface="Bodoni Ornaments" pitchFamily="2" charset="0"/>
+            </a:endParaRPr>
+          </a:p>
+        </p:txBody>
+      </p:sp>
+    </p:spTree>
+    <p:extLst>
+      <p:ext uri="{BB962C8B-B14F-4D97-AF65-F5344CB8AC3E}">
+        <p14:creationId xmlns:p14="http://schemas.microsoft.com/office/powerpoint/2010/main" val="1175457140"/>
+      </p:ext>
+    </p:extLst>
+  </p:cSld>
+  <p:clrMapOvr>
+    <a:masterClrMapping/>
+  </p:clrMapOvr>
+</p:sld>
+</file>
+
+<file path=ppt/slides/slide9.xml><?xml version="1.0" encoding="utf-8"?>
+<p:sld xmlns:a="http://schemas.openxmlformats.org/drawingml/2006/main" xmlns:r="http://schemas.openxmlformats.org/officeDocument/2006/relationships" xmlns:p="http://schemas.openxmlformats.org/presentationml/2006/main">
+  <p:cSld>
+    <p:bg>
+      <p:bgPr>
+        <a:solidFill>
+          <a:schemeClr val="tx1"/>
+        </a:solidFill>
+        <a:effectLst/>
+      </p:bgPr>
+    </p:bg>
+    <p:spTree>
+      <p:nvGrpSpPr>
+        <p:cNvPr id="1" name="">
+          <a:extLst>
+            <a:ext uri="{FF2B5EF4-FFF2-40B4-BE49-F238E27FC236}">
+              <a16:creationId xmlns:a16="http://schemas.microsoft.com/office/drawing/2014/main" id="{93C5A2DD-88D3-FF37-F873-F9901AF34AF0}"/>
+            </a:ext>
+          </a:extLst>
+        </p:cNvPr>
+        <p:cNvGrpSpPr/>
+        <p:nvPr/>
+      </p:nvGrpSpPr>
+      <p:grpSpPr>
+        <a:xfrm>
+          <a:off x="0" y="0"/>
+          <a:ext cx="0" cy="0"/>
+          <a:chOff x="0" y="0"/>
+          <a:chExt cx="0" cy="0"/>
+        </a:xfrm>
+      </p:grpSpPr>
+      <p:sp>
+        <p:nvSpPr>
+          <p:cNvPr id="3" name="Subtitle 2">
+            <a:extLst>
+              <a:ext uri="{FF2B5EF4-FFF2-40B4-BE49-F238E27FC236}">
+                <a16:creationId xmlns:a16="http://schemas.microsoft.com/office/drawing/2014/main" id="{60B9EAE4-E2B7-B093-5FFA-3641953C7068}"/>
+              </a:ext>
+            </a:extLst>
+          </p:cNvPr>
+          <p:cNvSpPr>
+            <a:spLocks noGrp="1"/>
+          </p:cNvSpPr>
+          <p:nvPr>
+            <p:ph type="subTitle" idx="1"/>
+          </p:nvPr>
+        </p:nvSpPr>
+        <p:spPr>
+          <a:xfrm>
+            <a:off x="84221" y="213360"/>
+            <a:ext cx="8891337" cy="6416040"/>
+          </a:xfrm>
+        </p:spPr>
+        <p:txBody>
+          <a:bodyPr>
+            <a:noAutofit/>
+          </a:bodyPr>
+          <a:lstStyle/>
+          <a:p>
+            <a:endParaRPr lang="en-US" sz="5400" dirty="0">
+              <a:solidFill>
+                <a:schemeClr val="bg1"/>
+              </a:solidFill>
+              <a:latin typeface="Avenir Medium" panose="02000503020000020003" pitchFamily="2" charset="0"/>
+              <a:ea typeface="Bodoni Ornaments" pitchFamily="2" charset="0"/>
+            </a:endParaRPr>
+          </a:p>
+          <a:p>
+            <a:r>
+              <a:rPr lang="en-US" sz="5400" dirty="0">
                 <a:solidFill>
                   <a:schemeClr val="bg1"/>
                 </a:solidFill>
                 <a:latin typeface="Avenir Medium" panose="02000503020000020003" pitchFamily="2" charset="0"/>
                 <a:ea typeface="Bodoni Ornaments" pitchFamily="2" charset="0"/>
               </a:rPr>
-              <a:t>All other ground is sinking sand</a:t>
-            </a:r>
-          </a:p>
-        </p:txBody>
-      </p:sp>
-      <p:sp>
-        <p:nvSpPr>
-          <p:cNvPr id="2" name="TextBox 1">
-            <a:extLst>
-              <a:ext uri="{FF2B5EF4-FFF2-40B4-BE49-F238E27FC236}">
-                <a16:creationId xmlns:a16="http://schemas.microsoft.com/office/drawing/2014/main" id="{973BEBA7-7845-C929-4BCD-E044B3B19645}"/>
-              </a:ext>
-            </a:extLst>
-          </p:cNvPr>
-          <p:cNvSpPr txBox="1"/>
-          <p:nvPr/>
-        </p:nvSpPr>
-        <p:spPr>
-          <a:xfrm>
-            <a:off x="7390614" y="6488668"/>
-            <a:ext cx="1753386" cy="369332"/>
-          </a:xfrm>
-          <a:prstGeom prst="rect">
-            <a:avLst/>
-          </a:prstGeom>
-          <a:noFill/>
-        </p:spPr>
-        <p:txBody>
-          <a:bodyPr wrap="square" rtlCol="0">
-            <a:spAutoFit/>
-          </a:bodyPr>
-          <a:lstStyle/>
-          <a:p>
-            <a:r>
-              <a:rPr lang="en-US" dirty="0">
+              <a:t>On Christ the solid rock </a:t>
+            </a:r>
+          </a:p>
+          <a:p>
+            <a:r>
+              <a:rPr lang="en-US" sz="5400" dirty="0">
                 <a:solidFill>
                   <a:schemeClr val="bg1"/>
                 </a:solidFill>
+                <a:latin typeface="Avenir Medium" panose="02000503020000020003" pitchFamily="2" charset="0"/>
+                <a:ea typeface="Bodoni Ornaments" pitchFamily="2" charset="0"/>
               </a:rPr>
-              <a:t>CCLI#7102397</a:t>
+              <a:t>I stand</a:t>
+            </a:r>
+          </a:p>
+          <a:p>
+            <a:endParaRPr lang="en-US" sz="5400" dirty="0">
+              <a:solidFill>
+                <a:schemeClr val="bg1"/>
+              </a:solidFill>
+              <a:latin typeface="Avenir Medium" panose="02000503020000020003" pitchFamily="2" charset="0"/>
+              <a:ea typeface="Bodoni Ornaments" pitchFamily="2" charset="0"/>
+            </a:endParaRPr>
+          </a:p>
+          <a:p>
+            <a:r>
+              <a:rPr lang="en-US" sz="5400" dirty="0">
+                <a:solidFill>
+                  <a:schemeClr val="bg1"/>
+                </a:solidFill>
+                <a:latin typeface="Avenir Medium" panose="02000503020000020003" pitchFamily="2" charset="0"/>
+                <a:ea typeface="Bodoni Ornaments" pitchFamily="2" charset="0"/>
+              </a:rPr>
+              <a:t>All other ground is </a:t>
+            </a:r>
+          </a:p>
+          <a:p>
+            <a:r>
+              <a:rPr lang="en-US" sz="5400" dirty="0">
+                <a:solidFill>
+                  <a:schemeClr val="bg1"/>
+                </a:solidFill>
+                <a:latin typeface="Avenir Medium" panose="02000503020000020003" pitchFamily="2" charset="0"/>
+                <a:ea typeface="Bodoni Ornaments" pitchFamily="2" charset="0"/>
+              </a:rPr>
+              <a:t>sinking sand</a:t>
             </a:r>
           </a:p>
         </p:txBody>
@@ -4173,7 +4686,7 @@
     </p:spTree>
     <p:extLst>
       <p:ext uri="{BB962C8B-B14F-4D97-AF65-F5344CB8AC3E}">
-        <p14:creationId xmlns:p14="http://schemas.microsoft.com/office/powerpoint/2010/main" val="505301207"/>
+        <p14:creationId xmlns:p14="http://schemas.microsoft.com/office/powerpoint/2010/main" val="1754456753"/>
       </p:ext>
     </p:extLst>
   </p:cSld>
